--- a/ppt/X25112627_marine-vessel-monitoring.pptx
+++ b/ppt/X25112627_marine-vessel-monitoring.pptx
@@ -3101,8 +3101,8 @@
         </p:nvSpPr>
         <p:spPr>
           <a:xfrm>
-            <a:off x="-45720" y="-45720"/>
-            <a:ext cx="12344400" cy="6949440"/>
+            <a:off x="-91440" y="-91440"/>
+            <a:ext cx="12435840" cy="7040880"/>
           </a:xfrm>
           <a:prstGeom prst="rect">
             <a:avLst/>
@@ -3139,58 +3139,23 @@
       </p:sp>
       <p:sp>
         <p:nvSpPr>
-          <p:cNvPr id="3" name="TextBox 2"/>
-          <p:cNvSpPr txBox="1"/>
+          <p:cNvPr id="3" name="Oval 2"/>
+          <p:cNvSpPr/>
           <p:nvPr/>
         </p:nvSpPr>
         <p:spPr>
           <a:xfrm>
-            <a:off x="777240" y="2194560"/>
-            <a:ext cx="10607040" cy="1554480"/>
+            <a:off x="5410504" y="777240"/>
+            <a:ext cx="1371600" cy="1371600"/>
           </a:xfrm>
-          <a:prstGeom prst="rect">
+          <a:prstGeom prst="ellipse">
             <a:avLst/>
           </a:prstGeom>
           <a:noFill/>
-        </p:spPr>
-        <p:txBody>
-          <a:bodyPr wrap="square" anchor="t">
-            <a:spAutoFit/>
-          </a:bodyPr>
-          <a:lstStyle/>
-          <a:p>
-            <a:pPr algn="l"/>
-            <a:r>
-              <a:rPr sz="3100" b="1">
-                <a:solidFill>
-                  <a:srgbClr val="7D9CAD"/>
-                </a:solidFill>
-                <a:latin typeface="Corbel"/>
-              </a:rPr>
-              <a:t>Marine Vessel Condition Monitoring</a:t>
-            </a:r>
-          </a:p>
-        </p:txBody>
-      </p:sp>
-      <p:sp>
-        <p:nvSpPr>
-          <p:cNvPr id="4" name="Rectangle 3"/>
-          <p:cNvSpPr/>
-          <p:nvPr/>
-        </p:nvSpPr>
-        <p:spPr>
-          <a:xfrm>
-            <a:off x="804672" y="3657600"/>
-            <a:ext cx="3474720" cy="45720"/>
-          </a:xfrm>
-          <a:prstGeom prst="rect">
-            <a:avLst/>
-          </a:prstGeom>
-          <a:solidFill>
-            <a:srgbClr val="7D9CAD"/>
-          </a:solidFill>
-          <a:ln>
-            <a:noFill/>
+          <a:ln w="38100">
+            <a:solidFill>
+              <a:srgbClr val="668C9F"/>
+            </a:solidFill>
           </a:ln>
           <a:effectLst/>
         </p:spPr>
@@ -3218,14 +3183,14 @@
       </p:sp>
       <p:sp>
         <p:nvSpPr>
-          <p:cNvPr id="5" name="TextBox 4"/>
+          <p:cNvPr id="4" name="TextBox 3"/>
           <p:cNvSpPr txBox="1"/>
           <p:nvPr/>
         </p:nvSpPr>
         <p:spPr>
           <a:xfrm>
-            <a:off x="804672" y="3886200"/>
-            <a:ext cx="10515600" cy="2194560"/>
+            <a:off x="5410504" y="777240"/>
+            <a:ext cx="1371600" cy="1371600"/>
           </a:xfrm>
           <a:prstGeom prst="rect">
             <a:avLst/>
@@ -3233,40 +3198,145 @@
           <a:noFill/>
         </p:spPr>
         <p:txBody>
+          <a:bodyPr wrap="none" anchor="ctr">
+            <a:spAutoFit/>
+          </a:bodyPr>
+          <a:lstStyle/>
+          <a:p>
+            <a:pPr algn="ctr"/>
+            <a:r>
+              <a:rPr sz="4500" b="1">
+                <a:solidFill>
+                  <a:srgbClr val="1B2024"/>
+                </a:solidFill>
+                <a:latin typeface="Corbel"/>
+              </a:rPr>
+              <a:t>MV</a:t>
+            </a:r>
+          </a:p>
+        </p:txBody>
+      </p:sp>
+      <p:sp>
+        <p:nvSpPr>
+          <p:cNvPr id="5" name="TextBox 4"/>
+          <p:cNvSpPr txBox="1"/>
+          <p:nvPr/>
+        </p:nvSpPr>
+        <p:spPr>
+          <a:xfrm>
+            <a:off x="914400" y="2606040"/>
+            <a:ext cx="10332720" cy="1554480"/>
+          </a:xfrm>
+          <a:prstGeom prst="rect">
+            <a:avLst/>
+          </a:prstGeom>
+          <a:noFill/>
+        </p:spPr>
+        <p:txBody>
+          <a:bodyPr wrap="square" anchor="ctr">
+            <a:spAutoFit/>
+          </a:bodyPr>
+          <a:lstStyle/>
+          <a:p>
+            <a:pPr algn="ctr"/>
+            <a:r>
+              <a:rPr sz="3400" b="1" i="0">
+                <a:solidFill>
+                  <a:srgbClr val="668C9F"/>
+                </a:solidFill>
+                <a:latin typeface="Corbel"/>
+              </a:rPr>
+              <a:t>Marine Vessel Condition Monitoring</a:t>
+            </a:r>
+          </a:p>
+        </p:txBody>
+      </p:sp>
+      <p:sp>
+        <p:nvSpPr>
+          <p:cNvPr id="6" name="TextBox 5"/>
+          <p:cNvSpPr txBox="1"/>
+          <p:nvPr/>
+        </p:nvSpPr>
+        <p:spPr>
+          <a:xfrm>
+            <a:off x="1371600" y="4023360"/>
+            <a:ext cx="9418320" cy="548640"/>
+          </a:xfrm>
+          <a:prstGeom prst="rect">
+            <a:avLst/>
+          </a:prstGeom>
+          <a:noFill/>
+        </p:spPr>
+        <p:txBody>
           <a:bodyPr wrap="square" anchor="t">
             <a:spAutoFit/>
           </a:bodyPr>
           <a:lstStyle/>
           <a:p>
-            <a:pPr algn="l"/>
-            <a:r>
-              <a:rPr sz="1800" b="0">
-                <a:solidFill>
-                  <a:srgbClr val="9AA6A2"/>
+            <a:pPr algn="ctr"/>
+            <a:r>
+              <a:rPr sz="1800" b="0" i="1">
+                <a:solidFill>
+                  <a:srgbClr val="C7CFCB"/>
                 </a:solidFill>
                 <a:latin typeface="Calibri"/>
               </a:rPr>
               <a:t>A fog and edge computing pipeline for two cruise vessels, deployed live on AWS</a:t>
             </a:r>
           </a:p>
-          <a:p>
-            <a:pPr algn="l"/>
-            <a:r>
-              <a:rPr sz="1600" b="1">
+        </p:txBody>
+      </p:sp>
+      <p:sp>
+        <p:nvSpPr>
+          <p:cNvPr id="7" name="TextBox 6"/>
+          <p:cNvSpPr txBox="1"/>
+          <p:nvPr/>
+        </p:nvSpPr>
+        <p:spPr>
+          <a:xfrm>
+            <a:off x="1371600" y="4937760"/>
+            <a:ext cx="9418320" cy="1371600"/>
+          </a:xfrm>
+          <a:prstGeom prst="rect">
+            <a:avLst/>
+          </a:prstGeom>
+          <a:noFill/>
+        </p:spPr>
+        <p:txBody>
+          <a:bodyPr wrap="square" anchor="t">
+            <a:spAutoFit/>
+          </a:bodyPr>
+          <a:lstStyle/>
+          <a:p>
+            <a:pPr algn="ctr"/>
+            <a:r>
+              <a:rPr sz="1700" b="1" i="0">
                 <a:solidFill>
                   <a:srgbClr val="E6EBE8"/>
                 </a:solidFill>
                 <a:latin typeface="Calibri"/>
               </a:rPr>
-              <a:t>Gopi Krishnan    Student ID X25112627</a:t>
-            </a:r>
-          </a:p>
-          <a:p>
-            <a:pPr algn="l"/>
-            <a:r>
-              <a:rPr sz="1300" b="0">
-                <a:solidFill>
-                  <a:srgbClr val="9AA6A2"/>
+              <a:t>Gopi Krishnan</a:t>
+            </a:r>
+          </a:p>
+          <a:p>
+            <a:pPr algn="ctr"/>
+            <a:r>
+              <a:rPr sz="1300" b="0" i="0">
+                <a:solidFill>
+                  <a:srgbClr val="98A3A0"/>
+                </a:solidFill>
+                <a:latin typeface="Calibri"/>
+              </a:rPr>
+              <a:t>Student ID X25112627</a:t>
+            </a:r>
+          </a:p>
+          <a:p>
+            <a:pPr algn="ctr"/>
+            <a:r>
+              <a:rPr sz="1250" b="0" i="0">
+                <a:solidFill>
+                  <a:srgbClr val="98A3A0"/>
                 </a:solidFill>
                 <a:latin typeface="Calibri"/>
               </a:rPr>
@@ -3274,11 +3344,11 @@
             </a:r>
           </a:p>
           <a:p>
-            <a:pPr algn="l"/>
-            <a:r>
-              <a:rPr sz="1300" b="0">
-                <a:solidFill>
-                  <a:srgbClr val="9AA6A2"/>
+            <a:pPr algn="ctr"/>
+            <a:r>
+              <a:rPr sz="1250" b="0" i="0">
+                <a:solidFill>
+                  <a:srgbClr val="98A3A0"/>
                 </a:solidFill>
                 <a:latin typeface="Calibri"/>
               </a:rPr>

--- a/ppt/X25112627_marine-vessel-monitoring.pptx
+++ b/ppt/X25112627_marine-vessel-monitoring.pptx
@@ -3139,58 +3139,14 @@
       </p:sp>
       <p:sp>
         <p:nvSpPr>
-          <p:cNvPr id="3" name="Oval 2"/>
-          <p:cNvSpPr/>
+          <p:cNvPr id="3" name="TextBox 2"/>
+          <p:cNvSpPr txBox="1"/>
           <p:nvPr/>
         </p:nvSpPr>
         <p:spPr>
           <a:xfrm>
-            <a:off x="5410504" y="777240"/>
-            <a:ext cx="1371600" cy="1371600"/>
-          </a:xfrm>
-          <a:prstGeom prst="ellipse">
-            <a:avLst/>
-          </a:prstGeom>
-          <a:noFill/>
-          <a:ln w="38100">
-            <a:solidFill>
-              <a:srgbClr val="668C9F"/>
-            </a:solidFill>
-          </a:ln>
-          <a:effectLst/>
-        </p:spPr>
-        <p:style>
-          <a:lnRef idx="1">
-            <a:schemeClr val="accent1"/>
-          </a:lnRef>
-          <a:fillRef idx="3">
-            <a:schemeClr val="accent1"/>
-          </a:fillRef>
-          <a:effectRef idx="2">
-            <a:schemeClr val="accent1"/>
-          </a:effectRef>
-          <a:fontRef idx="minor">
-            <a:schemeClr val="lt1"/>
-          </a:fontRef>
-        </p:style>
-        <p:txBody>
-          <a:bodyPr rtlCol="0" anchor="ctr"/>
-          <a:lstStyle/>
-          <a:p>
-            <a:pPr algn="ctr"/>
-          </a:p>
-        </p:txBody>
-      </p:sp>
-      <p:sp>
-        <p:nvSpPr>
-          <p:cNvPr id="4" name="TextBox 3"/>
-          <p:cNvSpPr txBox="1"/>
-          <p:nvPr/>
-        </p:nvSpPr>
-        <p:spPr>
-          <a:xfrm>
-            <a:off x="5410504" y="777240"/>
-            <a:ext cx="1371600" cy="1371600"/>
+            <a:off x="914400" y="2103120"/>
+            <a:ext cx="10332720" cy="1783080"/>
           </a:xfrm>
           <a:prstGeom prst="rect">
             <a:avLst/>
@@ -3198,41 +3154,6 @@
           <a:noFill/>
         </p:spPr>
         <p:txBody>
-          <a:bodyPr wrap="none" anchor="ctr">
-            <a:spAutoFit/>
-          </a:bodyPr>
-          <a:lstStyle/>
-          <a:p>
-            <a:pPr algn="ctr"/>
-            <a:r>
-              <a:rPr sz="4500" b="1">
-                <a:solidFill>
-                  <a:srgbClr val="1B2024"/>
-                </a:solidFill>
-                <a:latin typeface="Corbel"/>
-              </a:rPr>
-              <a:t>MV</a:t>
-            </a:r>
-          </a:p>
-        </p:txBody>
-      </p:sp>
-      <p:sp>
-        <p:nvSpPr>
-          <p:cNvPr id="5" name="TextBox 4"/>
-          <p:cNvSpPr txBox="1"/>
-          <p:nvPr/>
-        </p:nvSpPr>
-        <p:spPr>
-          <a:xfrm>
-            <a:off x="914400" y="2606040"/>
-            <a:ext cx="10332720" cy="1554480"/>
-          </a:xfrm>
-          <a:prstGeom prst="rect">
-            <a:avLst/>
-          </a:prstGeom>
-          <a:noFill/>
-        </p:spPr>
-        <p:txBody>
           <a:bodyPr wrap="square" anchor="ctr">
             <a:spAutoFit/>
           </a:bodyPr>
@@ -3253,13 +3174,13 @@
       </p:sp>
       <p:sp>
         <p:nvSpPr>
-          <p:cNvPr id="6" name="TextBox 5"/>
+          <p:cNvPr id="4" name="TextBox 3"/>
           <p:cNvSpPr txBox="1"/>
           <p:nvPr/>
         </p:nvSpPr>
         <p:spPr>
           <a:xfrm>
-            <a:off x="1371600" y="4023360"/>
+            <a:off x="1371600" y="3931920"/>
             <a:ext cx="9418320" cy="548640"/>
           </a:xfrm>
           <a:prstGeom prst="rect">
@@ -3288,13 +3209,13 @@
       </p:sp>
       <p:sp>
         <p:nvSpPr>
-          <p:cNvPr id="7" name="TextBox 6"/>
+          <p:cNvPr id="5" name="TextBox 4"/>
           <p:cNvSpPr txBox="1"/>
           <p:nvPr/>
         </p:nvSpPr>
         <p:spPr>
           <a:xfrm>
-            <a:off x="1371600" y="4937760"/>
+            <a:off x="1371600" y="4800600"/>
             <a:ext cx="9418320" cy="1371600"/>
           </a:xfrm>
           <a:prstGeom prst="rect">
